--- a/deck.pptx
+++ b/deck.pptx
@@ -3618,8 +3618,8 @@
         </p:nvSpPr>
         <p:spPr>
           <a:xfrm>
-            <a:off x="7933481" y="4368779"/>
-            <a:ext cx="3183556" cy="1598583"/>
+            <a:off x="7933481" y="4289202"/>
+            <a:ext cx="3183556" cy="1757737"/>
           </a:xfrm>
           <a:prstGeom prst="rect">
             <a:avLst/>
